--- a/NV Center Optimization gate_2023.01.16.pptx
+++ b/NV Center Optimization gate_2023.01.16.pptx
@@ -5,7 +5,7 @@
     <p:sldMasterId id="2147483648" r:id="rId1"/>
   </p:sldMasterIdLst>
   <p:notesMasterIdLst>
-    <p:notesMasterId r:id="rId17"/>
+    <p:notesMasterId r:id="rId20"/>
   </p:notesMasterIdLst>
   <p:sldIdLst>
     <p:sldId id="256" r:id="rId2"/>
@@ -23,6 +23,9 @@
     <p:sldId id="268" r:id="rId14"/>
     <p:sldId id="269" r:id="rId15"/>
     <p:sldId id="270" r:id="rId16"/>
+    <p:sldId id="271" r:id="rId17"/>
+    <p:sldId id="272" r:id="rId18"/>
+    <p:sldId id="273" r:id="rId19"/>
   </p:sldIdLst>
   <p:sldSz cx="12192000" cy="6858000"/>
   <p:notesSz cx="6858000" cy="9144000"/>
@@ -520,6 +523,358 @@
 </c:chartSpace>
 </file>
 
+<file path=ppt/charts/chart2.xml><?xml version="1.0" encoding="utf-8"?>
+<c:chartSpace xmlns:c="http://schemas.openxmlformats.org/drawingml/2006/chart" xmlns:a="http://schemas.openxmlformats.org/drawingml/2006/main" xmlns:r="http://schemas.openxmlformats.org/officeDocument/2006/relationships" xmlns:c16r2="http://schemas.microsoft.com/office/drawing/2015/06/chart">
+  <c:date1904 val="0"/>
+  <c:lang val="ko-KR"/>
+  <c:roundedCorners val="0"/>
+  <mc:AlternateContent xmlns:mc="http://schemas.openxmlformats.org/markup-compatibility/2006">
+    <mc:Choice xmlns:c14="http://schemas.microsoft.com/office/drawing/2007/8/2/chart" Requires="c14">
+      <c14:style val="102"/>
+    </mc:Choice>
+    <mc:Fallback>
+      <c:style val="2"/>
+    </mc:Fallback>
+  </mc:AlternateContent>
+  <c:chart>
+    <c:title>
+      <c:tx>
+        <c:rich>
+          <a:bodyPr rot="0" spcFirstLastPara="1" vertOverflow="ellipsis" vert="horz" wrap="square" anchor="ctr" anchorCtr="1"/>
+          <a:lstStyle/>
+          <a:p>
+            <a:pPr>
+              <a:defRPr sz="1862" b="0" i="0" u="none" strike="noStrike" kern="1200" spc="0" baseline="0">
+                <a:solidFill>
+                  <a:schemeClr val="tx1">
+                    <a:lumMod val="65000"/>
+                    <a:lumOff val="35000"/>
+                  </a:schemeClr>
+                </a:solidFill>
+                <a:latin typeface="+mn-lt"/>
+                <a:ea typeface="+mn-ea"/>
+                <a:cs typeface="+mn-cs"/>
+              </a:defRPr>
+            </a:pPr>
+            <a:r>
+              <a:rPr lang="en-US" altLang="ko-KR" dirty="0"/>
+              <a:t>Test 300</a:t>
+            </a:r>
+            <a:r>
+              <a:rPr lang="en-US" altLang="ko-KR" baseline="0" dirty="0"/>
+              <a:t> Times</a:t>
+            </a:r>
+            <a:endParaRPr lang="en-US" altLang="ko-KR" dirty="0"/>
+          </a:p>
+        </c:rich>
+      </c:tx>
+      <c:overlay val="0"/>
+      <c:spPr>
+        <a:noFill/>
+        <a:ln>
+          <a:noFill/>
+        </a:ln>
+        <a:effectLst/>
+      </c:spPr>
+      <c:txPr>
+        <a:bodyPr rot="0" spcFirstLastPara="1" vertOverflow="ellipsis" vert="horz" wrap="square" anchor="ctr" anchorCtr="1"/>
+        <a:lstStyle/>
+        <a:p>
+          <a:pPr>
+            <a:defRPr sz="1862" b="0" i="0" u="none" strike="noStrike" kern="1200" spc="0" baseline="0">
+              <a:solidFill>
+                <a:schemeClr val="tx1">
+                  <a:lumMod val="65000"/>
+                  <a:lumOff val="35000"/>
+                </a:schemeClr>
+              </a:solidFill>
+              <a:latin typeface="+mn-lt"/>
+              <a:ea typeface="+mn-ea"/>
+              <a:cs typeface="+mn-cs"/>
+            </a:defRPr>
+          </a:pPr>
+          <a:endParaRPr lang="ko-KR"/>
+        </a:p>
+      </c:txPr>
+    </c:title>
+    <c:autoTitleDeleted val="0"/>
+    <c:plotArea>
+      <c:layout/>
+      <c:lineChart>
+        <c:grouping val="standard"/>
+        <c:varyColors val="0"/>
+        <c:ser>
+          <c:idx val="0"/>
+          <c:order val="0"/>
+          <c:tx>
+            <c:strRef>
+              <c:f>Sheet1!$B$1</c:f>
+              <c:strCache>
+                <c:ptCount val="1"/>
+                <c:pt idx="0">
+                  <c:v>Test</c:v>
+                </c:pt>
+              </c:strCache>
+            </c:strRef>
+          </c:tx>
+          <c:spPr>
+            <a:ln w="28575" cap="rnd">
+              <a:solidFill>
+                <a:schemeClr val="accent1"/>
+              </a:solidFill>
+              <a:round/>
+            </a:ln>
+            <a:effectLst/>
+          </c:spPr>
+          <c:marker>
+            <c:symbol val="none"/>
+          </c:marker>
+          <c:cat>
+            <c:strRef>
+              <c:f>Sheet1!$A$2:$A$6</c:f>
+              <c:strCache>
+                <c:ptCount val="5"/>
+                <c:pt idx="0">
+                  <c:v>Case 1</c:v>
+                </c:pt>
+                <c:pt idx="1">
+                  <c:v>Case 2</c:v>
+                </c:pt>
+                <c:pt idx="2">
+                  <c:v>Case 3</c:v>
+                </c:pt>
+                <c:pt idx="3">
+                  <c:v>Case 4</c:v>
+                </c:pt>
+                <c:pt idx="4">
+                  <c:v>Case 5</c:v>
+                </c:pt>
+              </c:strCache>
+            </c:strRef>
+          </c:cat>
+          <c:val>
+            <c:numRef>
+              <c:f>Sheet1!$B$2:$B$6</c:f>
+              <c:numCache>
+                <c:formatCode>General</c:formatCode>
+                <c:ptCount val="5"/>
+                <c:pt idx="0">
+                  <c:v>200</c:v>
+                </c:pt>
+                <c:pt idx="1">
+                  <c:v>204</c:v>
+                </c:pt>
+                <c:pt idx="2">
+                  <c:v>198</c:v>
+                </c:pt>
+                <c:pt idx="3">
+                  <c:v>204</c:v>
+                </c:pt>
+                <c:pt idx="4">
+                  <c:v>202</c:v>
+                </c:pt>
+              </c:numCache>
+            </c:numRef>
+          </c:val>
+          <c:smooth val="0"/>
+          <c:extLst>
+            <c:ext xmlns:c16="http://schemas.microsoft.com/office/drawing/2014/chart" uri="{C3380CC4-5D6E-409C-BE32-E72D297353CC}">
+              <c16:uniqueId val="{00000000-39ED-444F-8CBF-CF2B87BFC433}"/>
+            </c:ext>
+          </c:extLst>
+        </c:ser>
+        <c:dLbls>
+          <c:showLegendKey val="0"/>
+          <c:showVal val="0"/>
+          <c:showCatName val="0"/>
+          <c:showSerName val="0"/>
+          <c:showPercent val="0"/>
+          <c:showBubbleSize val="0"/>
+        </c:dLbls>
+        <c:smooth val="0"/>
+        <c:axId val="1308482464"/>
+        <c:axId val="1308481216"/>
+      </c:lineChart>
+      <c:catAx>
+        <c:axId val="1308482464"/>
+        <c:scaling>
+          <c:orientation val="minMax"/>
+        </c:scaling>
+        <c:delete val="0"/>
+        <c:axPos val="b"/>
+        <c:numFmt formatCode="General" sourceLinked="1"/>
+        <c:majorTickMark val="none"/>
+        <c:minorTickMark val="none"/>
+        <c:tickLblPos val="nextTo"/>
+        <c:spPr>
+          <a:noFill/>
+          <a:ln w="9525" cap="flat" cmpd="sng" algn="ctr">
+            <a:solidFill>
+              <a:schemeClr val="tx1">
+                <a:lumMod val="15000"/>
+                <a:lumOff val="85000"/>
+              </a:schemeClr>
+            </a:solidFill>
+            <a:round/>
+          </a:ln>
+          <a:effectLst/>
+        </c:spPr>
+        <c:txPr>
+          <a:bodyPr rot="-60000000" spcFirstLastPara="1" vertOverflow="ellipsis" vert="horz" wrap="square" anchor="ctr" anchorCtr="1"/>
+          <a:lstStyle/>
+          <a:p>
+            <a:pPr>
+              <a:defRPr sz="1197" b="0" i="0" u="none" strike="noStrike" kern="1200" baseline="0">
+                <a:solidFill>
+                  <a:schemeClr val="tx1">
+                    <a:lumMod val="65000"/>
+                    <a:lumOff val="35000"/>
+                  </a:schemeClr>
+                </a:solidFill>
+                <a:latin typeface="+mn-lt"/>
+                <a:ea typeface="+mn-ea"/>
+                <a:cs typeface="+mn-cs"/>
+              </a:defRPr>
+            </a:pPr>
+            <a:endParaRPr lang="ko-KR"/>
+          </a:p>
+        </c:txPr>
+        <c:crossAx val="1308481216"/>
+        <c:crosses val="autoZero"/>
+        <c:auto val="1"/>
+        <c:lblAlgn val="ctr"/>
+        <c:lblOffset val="100"/>
+        <c:noMultiLvlLbl val="0"/>
+      </c:catAx>
+      <c:valAx>
+        <c:axId val="1308481216"/>
+        <c:scaling>
+          <c:orientation val="minMax"/>
+        </c:scaling>
+        <c:delete val="0"/>
+        <c:axPos val="l"/>
+        <c:majorGridlines>
+          <c:spPr>
+            <a:ln w="9525" cap="flat" cmpd="sng" algn="ctr">
+              <a:solidFill>
+                <a:schemeClr val="tx1">
+                  <a:lumMod val="15000"/>
+                  <a:lumOff val="85000"/>
+                </a:schemeClr>
+              </a:solidFill>
+              <a:round/>
+            </a:ln>
+            <a:effectLst/>
+          </c:spPr>
+        </c:majorGridlines>
+        <c:numFmt formatCode="General" sourceLinked="1"/>
+        <c:majorTickMark val="none"/>
+        <c:minorTickMark val="none"/>
+        <c:tickLblPos val="nextTo"/>
+        <c:spPr>
+          <a:noFill/>
+          <a:ln>
+            <a:noFill/>
+          </a:ln>
+          <a:effectLst/>
+        </c:spPr>
+        <c:txPr>
+          <a:bodyPr rot="-60000000" spcFirstLastPara="1" vertOverflow="ellipsis" vert="horz" wrap="square" anchor="ctr" anchorCtr="1"/>
+          <a:lstStyle/>
+          <a:p>
+            <a:pPr>
+              <a:defRPr sz="1197" b="0" i="0" u="none" strike="noStrike" kern="1200" baseline="0">
+                <a:solidFill>
+                  <a:schemeClr val="tx1">
+                    <a:lumMod val="65000"/>
+                    <a:lumOff val="35000"/>
+                  </a:schemeClr>
+                </a:solidFill>
+                <a:latin typeface="+mn-lt"/>
+                <a:ea typeface="+mn-ea"/>
+                <a:cs typeface="+mn-cs"/>
+              </a:defRPr>
+            </a:pPr>
+            <a:endParaRPr lang="ko-KR"/>
+          </a:p>
+        </c:txPr>
+        <c:crossAx val="1308482464"/>
+        <c:crosses val="autoZero"/>
+        <c:crossBetween val="between"/>
+      </c:valAx>
+      <c:spPr>
+        <a:noFill/>
+        <a:ln>
+          <a:noFill/>
+        </a:ln>
+        <a:effectLst/>
+      </c:spPr>
+    </c:plotArea>
+    <c:legend>
+      <c:legendPos val="b"/>
+      <c:overlay val="0"/>
+      <c:spPr>
+        <a:noFill/>
+        <a:ln>
+          <a:noFill/>
+        </a:ln>
+        <a:effectLst/>
+      </c:spPr>
+      <c:txPr>
+        <a:bodyPr rot="0" spcFirstLastPara="1" vertOverflow="ellipsis" vert="horz" wrap="square" anchor="ctr" anchorCtr="1"/>
+        <a:lstStyle/>
+        <a:p>
+          <a:pPr>
+            <a:defRPr sz="1197" b="0" i="0" u="none" strike="noStrike" kern="1200" baseline="0">
+              <a:solidFill>
+                <a:schemeClr val="tx1">
+                  <a:lumMod val="65000"/>
+                  <a:lumOff val="35000"/>
+                </a:schemeClr>
+              </a:solidFill>
+              <a:latin typeface="+mn-lt"/>
+              <a:ea typeface="+mn-ea"/>
+              <a:cs typeface="+mn-cs"/>
+            </a:defRPr>
+          </a:pPr>
+          <a:endParaRPr lang="ko-KR"/>
+        </a:p>
+      </c:txPr>
+    </c:legend>
+    <c:plotVisOnly val="1"/>
+    <c:dispBlanksAs val="gap"/>
+    <c:extLst>
+      <c:ext xmlns:c16r3="http://schemas.microsoft.com/office/drawing/2017/03/chart" uri="{56B9EC1D-385E-4148-901F-78D8002777C0}">
+        <c16r3:dataDisplayOptions16>
+          <c16r3:dispNaAsBlank val="1"/>
+        </c16r3:dataDisplayOptions16>
+      </c:ext>
+    </c:extLst>
+    <c:showDLblsOverMax val="0"/>
+  </c:chart>
+  <c:spPr>
+    <a:noFill/>
+    <a:ln>
+      <a:noFill/>
+    </a:ln>
+    <a:effectLst/>
+  </c:spPr>
+  <c:txPr>
+    <a:bodyPr/>
+    <a:lstStyle/>
+    <a:p>
+      <a:pPr>
+        <a:defRPr/>
+      </a:pPr>
+      <a:endParaRPr lang="ko-KR"/>
+    </a:p>
+  </c:txPr>
+  <c:externalData r:id="rId3">
+    <c:autoUpdate val="0"/>
+  </c:externalData>
+</c:chartSpace>
+</file>
+
 <file path=ppt/charts/colors1.xml><?xml version="1.0" encoding="utf-8"?>
 <cs:colorStyle xmlns:cs="http://schemas.microsoft.com/office/drawing/2012/chartStyle" xmlns:a="http://schemas.openxmlformats.org/drawingml/2006/main" meth="cycle" id="10">
   <a:schemeClr val="accent1"/>
@@ -560,7 +915,563 @@
 </cs:colorStyle>
 </file>
 
+<file path=ppt/charts/colors2.xml><?xml version="1.0" encoding="utf-8"?>
+<cs:colorStyle xmlns:cs="http://schemas.microsoft.com/office/drawing/2012/chartStyle" xmlns:a="http://schemas.openxmlformats.org/drawingml/2006/main" meth="cycle" id="10">
+  <a:schemeClr val="accent1"/>
+  <a:schemeClr val="accent2"/>
+  <a:schemeClr val="accent3"/>
+  <a:schemeClr val="accent4"/>
+  <a:schemeClr val="accent5"/>
+  <a:schemeClr val="accent6"/>
+  <cs:variation/>
+  <cs:variation>
+    <a:lumMod val="60000"/>
+  </cs:variation>
+  <cs:variation>
+    <a:lumMod val="80000"/>
+    <a:lumOff val="20000"/>
+  </cs:variation>
+  <cs:variation>
+    <a:lumMod val="80000"/>
+  </cs:variation>
+  <cs:variation>
+    <a:lumMod val="60000"/>
+    <a:lumOff val="40000"/>
+  </cs:variation>
+  <cs:variation>
+    <a:lumMod val="50000"/>
+  </cs:variation>
+  <cs:variation>
+    <a:lumMod val="70000"/>
+    <a:lumOff val="30000"/>
+  </cs:variation>
+  <cs:variation>
+    <a:lumMod val="70000"/>
+  </cs:variation>
+  <cs:variation>
+    <a:lumMod val="50000"/>
+    <a:lumOff val="50000"/>
+  </cs:variation>
+</cs:colorStyle>
+</file>
+
 <file path=ppt/charts/style1.xml><?xml version="1.0" encoding="utf-8"?>
+<cs:chartStyle xmlns:cs="http://schemas.microsoft.com/office/drawing/2012/chartStyle" xmlns:a="http://schemas.openxmlformats.org/drawingml/2006/main" id="227">
+  <cs:axisTitle>
+    <cs:lnRef idx="0"/>
+    <cs:fillRef idx="0"/>
+    <cs:effectRef idx="0"/>
+    <cs:fontRef idx="minor">
+      <a:schemeClr val="tx1">
+        <a:lumMod val="65000"/>
+        <a:lumOff val="35000"/>
+      </a:schemeClr>
+    </cs:fontRef>
+    <cs:defRPr sz="1330" kern="1200"/>
+  </cs:axisTitle>
+  <cs:categoryAxis>
+    <cs:lnRef idx="0"/>
+    <cs:fillRef idx="0"/>
+    <cs:effectRef idx="0"/>
+    <cs:fontRef idx="minor">
+      <a:schemeClr val="tx1">
+        <a:lumMod val="65000"/>
+        <a:lumOff val="35000"/>
+      </a:schemeClr>
+    </cs:fontRef>
+    <cs:spPr>
+      <a:ln w="9525" cap="flat" cmpd="sng" algn="ctr">
+        <a:solidFill>
+          <a:schemeClr val="tx1">
+            <a:lumMod val="15000"/>
+            <a:lumOff val="85000"/>
+          </a:schemeClr>
+        </a:solidFill>
+        <a:round/>
+      </a:ln>
+    </cs:spPr>
+    <cs:defRPr sz="1197" kern="1200"/>
+  </cs:categoryAxis>
+  <cs:chartArea mods="allowNoFillOverride allowNoLineOverride">
+    <cs:lnRef idx="0"/>
+    <cs:fillRef idx="0"/>
+    <cs:effectRef idx="0"/>
+    <cs:fontRef idx="minor">
+      <a:schemeClr val="tx1"/>
+    </cs:fontRef>
+    <cs:spPr>
+      <a:solidFill>
+        <a:schemeClr val="bg1"/>
+      </a:solidFill>
+      <a:ln w="9525" cap="flat" cmpd="sng" algn="ctr">
+        <a:solidFill>
+          <a:schemeClr val="tx1">
+            <a:lumMod val="15000"/>
+            <a:lumOff val="85000"/>
+          </a:schemeClr>
+        </a:solidFill>
+        <a:round/>
+      </a:ln>
+    </cs:spPr>
+    <cs:defRPr sz="1330" kern="1200"/>
+  </cs:chartArea>
+  <cs:dataLabel>
+    <cs:lnRef idx="0"/>
+    <cs:fillRef idx="0"/>
+    <cs:effectRef idx="0"/>
+    <cs:fontRef idx="minor">
+      <a:schemeClr val="tx1">
+        <a:lumMod val="75000"/>
+        <a:lumOff val="25000"/>
+      </a:schemeClr>
+    </cs:fontRef>
+    <cs:defRPr sz="1197" kern="1200"/>
+  </cs:dataLabel>
+  <cs:dataLabelCallout>
+    <cs:lnRef idx="0"/>
+    <cs:fillRef idx="0"/>
+    <cs:effectRef idx="0"/>
+    <cs:fontRef idx="minor">
+      <a:schemeClr val="dk1">
+        <a:lumMod val="65000"/>
+        <a:lumOff val="35000"/>
+      </a:schemeClr>
+    </cs:fontRef>
+    <cs:spPr>
+      <a:solidFill>
+        <a:schemeClr val="lt1"/>
+      </a:solidFill>
+      <a:ln>
+        <a:solidFill>
+          <a:schemeClr val="dk1">
+            <a:lumMod val="25000"/>
+            <a:lumOff val="75000"/>
+          </a:schemeClr>
+        </a:solidFill>
+      </a:ln>
+    </cs:spPr>
+    <cs:defRPr sz="1197" kern="1200"/>
+    <cs:bodyPr rot="0" spcFirstLastPara="1" vertOverflow="clip" horzOverflow="clip" vert="horz" wrap="square" lIns="36576" tIns="18288" rIns="36576" bIns="18288" anchor="ctr" anchorCtr="1">
+      <a:spAutoFit/>
+    </cs:bodyPr>
+  </cs:dataLabelCallout>
+  <cs:dataPoint>
+    <cs:lnRef idx="0"/>
+    <cs:fillRef idx="1">
+      <cs:styleClr val="auto"/>
+    </cs:fillRef>
+    <cs:effectRef idx="0"/>
+    <cs:fontRef idx="minor">
+      <a:schemeClr val="tx1"/>
+    </cs:fontRef>
+    <cs:spPr>
+      <a:solidFill>
+        <a:schemeClr val="phClr"/>
+      </a:solidFill>
+    </cs:spPr>
+  </cs:dataPoint>
+  <cs:dataPoint3D>
+    <cs:lnRef idx="0"/>
+    <cs:fillRef idx="1">
+      <cs:styleClr val="auto"/>
+    </cs:fillRef>
+    <cs:effectRef idx="0"/>
+    <cs:fontRef idx="minor">
+      <a:schemeClr val="tx1"/>
+    </cs:fontRef>
+    <cs:spPr>
+      <a:solidFill>
+        <a:schemeClr val="phClr"/>
+      </a:solidFill>
+    </cs:spPr>
+  </cs:dataPoint3D>
+  <cs:dataPointLine>
+    <cs:lnRef idx="0">
+      <cs:styleClr val="auto"/>
+    </cs:lnRef>
+    <cs:fillRef idx="1"/>
+    <cs:effectRef idx="0"/>
+    <cs:fontRef idx="minor">
+      <a:schemeClr val="tx1"/>
+    </cs:fontRef>
+    <cs:spPr>
+      <a:ln w="28575" cap="rnd">
+        <a:solidFill>
+          <a:schemeClr val="phClr"/>
+        </a:solidFill>
+        <a:round/>
+      </a:ln>
+    </cs:spPr>
+  </cs:dataPointLine>
+  <cs:dataPointMarker>
+    <cs:lnRef idx="0">
+      <cs:styleClr val="auto"/>
+    </cs:lnRef>
+    <cs:fillRef idx="1">
+      <cs:styleClr val="auto"/>
+    </cs:fillRef>
+    <cs:effectRef idx="0"/>
+    <cs:fontRef idx="minor">
+      <a:schemeClr val="tx1"/>
+    </cs:fontRef>
+    <cs:spPr>
+      <a:solidFill>
+        <a:schemeClr val="phClr"/>
+      </a:solidFill>
+      <a:ln w="9525">
+        <a:solidFill>
+          <a:schemeClr val="phClr"/>
+        </a:solidFill>
+      </a:ln>
+    </cs:spPr>
+  </cs:dataPointMarker>
+  <cs:dataPointMarkerLayout symbol="circle" size="5"/>
+  <cs:dataPointWireframe>
+    <cs:lnRef idx="0">
+      <cs:styleClr val="auto"/>
+    </cs:lnRef>
+    <cs:fillRef idx="1"/>
+    <cs:effectRef idx="0"/>
+    <cs:fontRef idx="minor">
+      <a:schemeClr val="tx1"/>
+    </cs:fontRef>
+    <cs:spPr>
+      <a:ln w="9525" cap="rnd">
+        <a:solidFill>
+          <a:schemeClr val="phClr"/>
+        </a:solidFill>
+        <a:round/>
+      </a:ln>
+    </cs:spPr>
+  </cs:dataPointWireframe>
+  <cs:dataTable>
+    <cs:lnRef idx="0"/>
+    <cs:fillRef idx="0"/>
+    <cs:effectRef idx="0"/>
+    <cs:fontRef idx="minor">
+      <a:schemeClr val="tx1">
+        <a:lumMod val="65000"/>
+        <a:lumOff val="35000"/>
+      </a:schemeClr>
+    </cs:fontRef>
+    <cs:spPr>
+      <a:noFill/>
+      <a:ln w="9525" cap="flat" cmpd="sng" algn="ctr">
+        <a:solidFill>
+          <a:schemeClr val="tx1">
+            <a:lumMod val="15000"/>
+            <a:lumOff val="85000"/>
+          </a:schemeClr>
+        </a:solidFill>
+        <a:round/>
+      </a:ln>
+    </cs:spPr>
+    <cs:defRPr sz="1197" kern="1200"/>
+  </cs:dataTable>
+  <cs:downBar>
+    <cs:lnRef idx="0"/>
+    <cs:fillRef idx="0"/>
+    <cs:effectRef idx="0"/>
+    <cs:fontRef idx="minor">
+      <a:schemeClr val="dk1"/>
+    </cs:fontRef>
+    <cs:spPr>
+      <a:solidFill>
+        <a:schemeClr val="dk1">
+          <a:lumMod val="65000"/>
+          <a:lumOff val="35000"/>
+        </a:schemeClr>
+      </a:solidFill>
+      <a:ln w="9525">
+        <a:solidFill>
+          <a:schemeClr val="tx1">
+            <a:lumMod val="65000"/>
+            <a:lumOff val="35000"/>
+          </a:schemeClr>
+        </a:solidFill>
+      </a:ln>
+    </cs:spPr>
+  </cs:downBar>
+  <cs:dropLine>
+    <cs:lnRef idx="0"/>
+    <cs:fillRef idx="0"/>
+    <cs:effectRef idx="0"/>
+    <cs:fontRef idx="minor">
+      <a:schemeClr val="tx1"/>
+    </cs:fontRef>
+    <cs:spPr>
+      <a:ln w="9525" cap="flat" cmpd="sng" algn="ctr">
+        <a:solidFill>
+          <a:schemeClr val="tx1">
+            <a:lumMod val="35000"/>
+            <a:lumOff val="65000"/>
+          </a:schemeClr>
+        </a:solidFill>
+        <a:round/>
+      </a:ln>
+    </cs:spPr>
+  </cs:dropLine>
+  <cs:errorBar>
+    <cs:lnRef idx="0"/>
+    <cs:fillRef idx="0"/>
+    <cs:effectRef idx="0"/>
+    <cs:fontRef idx="minor">
+      <a:schemeClr val="tx1"/>
+    </cs:fontRef>
+    <cs:spPr>
+      <a:ln w="9525" cap="flat" cmpd="sng" algn="ctr">
+        <a:solidFill>
+          <a:schemeClr val="tx1">
+            <a:lumMod val="65000"/>
+            <a:lumOff val="35000"/>
+          </a:schemeClr>
+        </a:solidFill>
+        <a:round/>
+      </a:ln>
+    </cs:spPr>
+  </cs:errorBar>
+  <cs:floor>
+    <cs:lnRef idx="0"/>
+    <cs:fillRef idx="0"/>
+    <cs:effectRef idx="0"/>
+    <cs:fontRef idx="minor">
+      <a:schemeClr val="tx1"/>
+    </cs:fontRef>
+    <cs:spPr>
+      <a:noFill/>
+      <a:ln>
+        <a:noFill/>
+      </a:ln>
+    </cs:spPr>
+  </cs:floor>
+  <cs:gridlineMajor>
+    <cs:lnRef idx="0"/>
+    <cs:fillRef idx="0"/>
+    <cs:effectRef idx="0"/>
+    <cs:fontRef idx="minor">
+      <a:schemeClr val="tx1"/>
+    </cs:fontRef>
+    <cs:spPr>
+      <a:ln w="9525" cap="flat" cmpd="sng" algn="ctr">
+        <a:solidFill>
+          <a:schemeClr val="tx1">
+            <a:lumMod val="15000"/>
+            <a:lumOff val="85000"/>
+          </a:schemeClr>
+        </a:solidFill>
+        <a:round/>
+      </a:ln>
+    </cs:spPr>
+  </cs:gridlineMajor>
+  <cs:gridlineMinor>
+    <cs:lnRef idx="0"/>
+    <cs:fillRef idx="0"/>
+    <cs:effectRef idx="0"/>
+    <cs:fontRef idx="minor">
+      <a:schemeClr val="tx1"/>
+    </cs:fontRef>
+    <cs:spPr>
+      <a:ln w="9525" cap="flat" cmpd="sng" algn="ctr">
+        <a:solidFill>
+          <a:schemeClr val="tx1">
+            <a:lumMod val="5000"/>
+            <a:lumOff val="95000"/>
+          </a:schemeClr>
+        </a:solidFill>
+        <a:round/>
+      </a:ln>
+    </cs:spPr>
+  </cs:gridlineMinor>
+  <cs:hiLoLine>
+    <cs:lnRef idx="0"/>
+    <cs:fillRef idx="0"/>
+    <cs:effectRef idx="0"/>
+    <cs:fontRef idx="minor">
+      <a:schemeClr val="tx1"/>
+    </cs:fontRef>
+    <cs:spPr>
+      <a:ln w="9525" cap="flat" cmpd="sng" algn="ctr">
+        <a:solidFill>
+          <a:schemeClr val="tx1">
+            <a:lumMod val="75000"/>
+            <a:lumOff val="25000"/>
+          </a:schemeClr>
+        </a:solidFill>
+        <a:round/>
+      </a:ln>
+    </cs:spPr>
+  </cs:hiLoLine>
+  <cs:leaderLine>
+    <cs:lnRef idx="0"/>
+    <cs:fillRef idx="0"/>
+    <cs:effectRef idx="0"/>
+    <cs:fontRef idx="minor">
+      <a:schemeClr val="tx1"/>
+    </cs:fontRef>
+    <cs:spPr>
+      <a:ln w="9525" cap="flat" cmpd="sng" algn="ctr">
+        <a:solidFill>
+          <a:schemeClr val="tx1">
+            <a:lumMod val="35000"/>
+            <a:lumOff val="65000"/>
+          </a:schemeClr>
+        </a:solidFill>
+        <a:round/>
+      </a:ln>
+    </cs:spPr>
+  </cs:leaderLine>
+  <cs:legend>
+    <cs:lnRef idx="0"/>
+    <cs:fillRef idx="0"/>
+    <cs:effectRef idx="0"/>
+    <cs:fontRef idx="minor">
+      <a:schemeClr val="tx1">
+        <a:lumMod val="65000"/>
+        <a:lumOff val="35000"/>
+      </a:schemeClr>
+    </cs:fontRef>
+    <cs:defRPr sz="1197" kern="1200"/>
+  </cs:legend>
+  <cs:plotArea mods="allowNoFillOverride allowNoLineOverride">
+    <cs:lnRef idx="0"/>
+    <cs:fillRef idx="0"/>
+    <cs:effectRef idx="0"/>
+    <cs:fontRef idx="minor">
+      <a:schemeClr val="tx1"/>
+    </cs:fontRef>
+  </cs:plotArea>
+  <cs:plotArea3D mods="allowNoFillOverride allowNoLineOverride">
+    <cs:lnRef idx="0"/>
+    <cs:fillRef idx="0"/>
+    <cs:effectRef idx="0"/>
+    <cs:fontRef idx="minor">
+      <a:schemeClr val="tx1"/>
+    </cs:fontRef>
+  </cs:plotArea3D>
+  <cs:seriesAxis>
+    <cs:lnRef idx="0"/>
+    <cs:fillRef idx="0"/>
+    <cs:effectRef idx="0"/>
+    <cs:fontRef idx="minor">
+      <a:schemeClr val="tx1">
+        <a:lumMod val="65000"/>
+        <a:lumOff val="35000"/>
+      </a:schemeClr>
+    </cs:fontRef>
+    <cs:defRPr sz="1197" kern="1200"/>
+  </cs:seriesAxis>
+  <cs:seriesLine>
+    <cs:lnRef idx="0"/>
+    <cs:fillRef idx="0"/>
+    <cs:effectRef idx="0"/>
+    <cs:fontRef idx="minor">
+      <a:schemeClr val="tx1"/>
+    </cs:fontRef>
+    <cs:spPr>
+      <a:ln w="9525" cap="flat" cmpd="sng" algn="ctr">
+        <a:solidFill>
+          <a:schemeClr val="tx1">
+            <a:lumMod val="35000"/>
+            <a:lumOff val="65000"/>
+          </a:schemeClr>
+        </a:solidFill>
+        <a:round/>
+      </a:ln>
+    </cs:spPr>
+  </cs:seriesLine>
+  <cs:title>
+    <cs:lnRef idx="0"/>
+    <cs:fillRef idx="0"/>
+    <cs:effectRef idx="0"/>
+    <cs:fontRef idx="minor">
+      <a:schemeClr val="tx1">
+        <a:lumMod val="65000"/>
+        <a:lumOff val="35000"/>
+      </a:schemeClr>
+    </cs:fontRef>
+    <cs:defRPr sz="1862" b="0" kern="1200" spc="0" baseline="0"/>
+  </cs:title>
+  <cs:trendline>
+    <cs:lnRef idx="0">
+      <cs:styleClr val="auto"/>
+    </cs:lnRef>
+    <cs:fillRef idx="0"/>
+    <cs:effectRef idx="0"/>
+    <cs:fontRef idx="minor">
+      <a:schemeClr val="tx1"/>
+    </cs:fontRef>
+    <cs:spPr>
+      <a:ln w="19050" cap="rnd">
+        <a:solidFill>
+          <a:schemeClr val="phClr"/>
+        </a:solidFill>
+        <a:prstDash val="sysDot"/>
+      </a:ln>
+    </cs:spPr>
+  </cs:trendline>
+  <cs:trendlineLabel>
+    <cs:lnRef idx="0"/>
+    <cs:fillRef idx="0"/>
+    <cs:effectRef idx="0"/>
+    <cs:fontRef idx="minor">
+      <a:schemeClr val="tx1">
+        <a:lumMod val="65000"/>
+        <a:lumOff val="35000"/>
+      </a:schemeClr>
+    </cs:fontRef>
+    <cs:defRPr sz="1197" kern="1200"/>
+  </cs:trendlineLabel>
+  <cs:upBar>
+    <cs:lnRef idx="0"/>
+    <cs:fillRef idx="0"/>
+    <cs:effectRef idx="0"/>
+    <cs:fontRef idx="minor">
+      <a:schemeClr val="dk1"/>
+    </cs:fontRef>
+    <cs:spPr>
+      <a:solidFill>
+        <a:schemeClr val="lt1"/>
+      </a:solidFill>
+      <a:ln w="9525">
+        <a:solidFill>
+          <a:schemeClr val="tx1">
+            <a:lumMod val="15000"/>
+            <a:lumOff val="85000"/>
+          </a:schemeClr>
+        </a:solidFill>
+      </a:ln>
+    </cs:spPr>
+  </cs:upBar>
+  <cs:valueAxis>
+    <cs:lnRef idx="0"/>
+    <cs:fillRef idx="0"/>
+    <cs:effectRef idx="0"/>
+    <cs:fontRef idx="minor">
+      <a:schemeClr val="tx1">
+        <a:lumMod val="65000"/>
+        <a:lumOff val="35000"/>
+      </a:schemeClr>
+    </cs:fontRef>
+    <cs:defRPr sz="1197" kern="1200"/>
+  </cs:valueAxis>
+  <cs:wall>
+    <cs:lnRef idx="0"/>
+    <cs:fillRef idx="0"/>
+    <cs:effectRef idx="0"/>
+    <cs:fontRef idx="minor">
+      <a:schemeClr val="tx1"/>
+    </cs:fontRef>
+    <cs:spPr>
+      <a:noFill/>
+      <a:ln>
+        <a:noFill/>
+      </a:ln>
+    </cs:spPr>
+  </cs:wall>
+</cs:chartStyle>
+</file>
+
+<file path=ppt/charts/style2.xml><?xml version="1.0" encoding="utf-8"?>
 <cs:chartStyle xmlns:cs="http://schemas.microsoft.com/office/drawing/2012/chartStyle" xmlns:a="http://schemas.openxmlformats.org/drawingml/2006/main" id="227">
   <cs:axisTitle>
     <cs:lnRef idx="0"/>
@@ -6930,7 +7841,7 @@
           <a:p>
             <a:fld id="{6B06A8CE-39C4-482E-A713-99AAEDE90BAB}" type="datetimeFigureOut">
               <a:rPr lang="ko-KR" altLang="en-US" smtClean="0"/>
-              <a:t>2023-01-16</a:t>
+              <a:t>2023-01-18</a:t>
             </a:fld>
             <a:endParaRPr lang="ko-KR" altLang="en-US"/>
           </a:p>
@@ -7847,6 +8758,174 @@
 </p:notes>
 </file>
 
+<file path=ppt/notesSlides/notesSlide5.xml><?xml version="1.0" encoding="utf-8"?>
+<p:notes xmlns:a="http://schemas.openxmlformats.org/drawingml/2006/main" xmlns:r="http://schemas.openxmlformats.org/officeDocument/2006/relationships" xmlns:p="http://schemas.openxmlformats.org/presentationml/2006/main">
+  <p:cSld>
+    <p:spTree>
+      <p:nvGrpSpPr>
+        <p:cNvPr id="1" name=""/>
+        <p:cNvGrpSpPr/>
+        <p:nvPr/>
+      </p:nvGrpSpPr>
+      <p:grpSpPr>
+        <a:xfrm>
+          <a:off x="0" y="0"/>
+          <a:ext cx="0" cy="0"/>
+          <a:chOff x="0" y="0"/>
+          <a:chExt cx="0" cy="0"/>
+        </a:xfrm>
+      </p:grpSpPr>
+      <p:sp>
+        <p:nvSpPr>
+          <p:cNvPr id="2" name="슬라이드 이미지 개체 틀 1"/>
+          <p:cNvSpPr>
+            <a:spLocks noGrp="1" noRot="1" noChangeAspect="1"/>
+          </p:cNvSpPr>
+          <p:nvPr>
+            <p:ph type="sldImg"/>
+          </p:nvPr>
+        </p:nvSpPr>
+        <p:spPr/>
+      </p:sp>
+      <p:sp>
+        <p:nvSpPr>
+          <p:cNvPr id="3" name="슬라이드 노트 개체 틀 2"/>
+          <p:cNvSpPr>
+            <a:spLocks noGrp="1"/>
+          </p:cNvSpPr>
+          <p:nvPr>
+            <p:ph type="body" idx="1"/>
+          </p:nvPr>
+        </p:nvSpPr>
+        <p:spPr/>
+        <p:txBody>
+          <a:bodyPr/>
+          <a:lstStyle/>
+          <a:p>
+            <a:endParaRPr lang="ko-KR" altLang="en-US" dirty="0"/>
+          </a:p>
+        </p:txBody>
+      </p:sp>
+      <p:sp>
+        <p:nvSpPr>
+          <p:cNvPr id="4" name="슬라이드 번호 개체 틀 3"/>
+          <p:cNvSpPr>
+            <a:spLocks noGrp="1"/>
+          </p:cNvSpPr>
+          <p:nvPr>
+            <p:ph type="sldNum" sz="quarter" idx="5"/>
+          </p:nvPr>
+        </p:nvSpPr>
+        <p:spPr/>
+        <p:txBody>
+          <a:bodyPr/>
+          <a:lstStyle/>
+          <a:p>
+            <a:fld id="{34814C18-13D7-4FE8-824F-8A4962C77F6A}" type="slidenum">
+              <a:rPr lang="ko-KR" altLang="en-US" smtClean="0"/>
+              <a:t>16</a:t>
+            </a:fld>
+            <a:endParaRPr lang="ko-KR" altLang="en-US"/>
+          </a:p>
+        </p:txBody>
+      </p:sp>
+    </p:spTree>
+    <p:extLst>
+      <p:ext uri="{BB962C8B-B14F-4D97-AF65-F5344CB8AC3E}">
+        <p14:creationId xmlns:p14="http://schemas.microsoft.com/office/powerpoint/2010/main" val="3640560001"/>
+      </p:ext>
+    </p:extLst>
+  </p:cSld>
+  <p:clrMapOvr>
+    <a:masterClrMapping/>
+  </p:clrMapOvr>
+</p:notes>
+</file>
+
+<file path=ppt/notesSlides/notesSlide6.xml><?xml version="1.0" encoding="utf-8"?>
+<p:notes xmlns:a="http://schemas.openxmlformats.org/drawingml/2006/main" xmlns:r="http://schemas.openxmlformats.org/officeDocument/2006/relationships" xmlns:p="http://schemas.openxmlformats.org/presentationml/2006/main">
+  <p:cSld>
+    <p:spTree>
+      <p:nvGrpSpPr>
+        <p:cNvPr id="1" name=""/>
+        <p:cNvGrpSpPr/>
+        <p:nvPr/>
+      </p:nvGrpSpPr>
+      <p:grpSpPr>
+        <a:xfrm>
+          <a:off x="0" y="0"/>
+          <a:ext cx="0" cy="0"/>
+          <a:chOff x="0" y="0"/>
+          <a:chExt cx="0" cy="0"/>
+        </a:xfrm>
+      </p:grpSpPr>
+      <p:sp>
+        <p:nvSpPr>
+          <p:cNvPr id="2" name="슬라이드 이미지 개체 틀 1"/>
+          <p:cNvSpPr>
+            <a:spLocks noGrp="1" noRot="1" noChangeAspect="1"/>
+          </p:cNvSpPr>
+          <p:nvPr>
+            <p:ph type="sldImg"/>
+          </p:nvPr>
+        </p:nvSpPr>
+        <p:spPr/>
+      </p:sp>
+      <p:sp>
+        <p:nvSpPr>
+          <p:cNvPr id="3" name="슬라이드 노트 개체 틀 2"/>
+          <p:cNvSpPr>
+            <a:spLocks noGrp="1"/>
+          </p:cNvSpPr>
+          <p:nvPr>
+            <p:ph type="body" idx="1"/>
+          </p:nvPr>
+        </p:nvSpPr>
+        <p:spPr/>
+        <p:txBody>
+          <a:bodyPr/>
+          <a:lstStyle/>
+          <a:p>
+            <a:endParaRPr lang="ko-KR" altLang="en-US" dirty="0"/>
+          </a:p>
+        </p:txBody>
+      </p:sp>
+      <p:sp>
+        <p:nvSpPr>
+          <p:cNvPr id="4" name="슬라이드 번호 개체 틀 3"/>
+          <p:cNvSpPr>
+            <a:spLocks noGrp="1"/>
+          </p:cNvSpPr>
+          <p:nvPr>
+            <p:ph type="sldNum" sz="quarter" idx="5"/>
+          </p:nvPr>
+        </p:nvSpPr>
+        <p:spPr/>
+        <p:txBody>
+          <a:bodyPr/>
+          <a:lstStyle/>
+          <a:p>
+            <a:fld id="{34814C18-13D7-4FE8-824F-8A4962C77F6A}" type="slidenum">
+              <a:rPr lang="ko-KR" altLang="en-US" smtClean="0"/>
+              <a:t>17</a:t>
+            </a:fld>
+            <a:endParaRPr lang="ko-KR" altLang="en-US"/>
+          </a:p>
+        </p:txBody>
+      </p:sp>
+    </p:spTree>
+    <p:extLst>
+      <p:ext uri="{BB962C8B-B14F-4D97-AF65-F5344CB8AC3E}">
+        <p14:creationId xmlns:p14="http://schemas.microsoft.com/office/powerpoint/2010/main" val="2684784544"/>
+      </p:ext>
+    </p:extLst>
+  </p:cSld>
+  <p:clrMapOvr>
+    <a:masterClrMapping/>
+  </p:clrMapOvr>
+</p:notes>
+</file>
+
 <file path=ppt/slideLayouts/slideLayout1.xml><?xml version="1.0" encoding="utf-8"?>
 <p:sldLayout xmlns:a="http://schemas.openxmlformats.org/drawingml/2006/main" xmlns:r="http://schemas.openxmlformats.org/officeDocument/2006/relationships" xmlns:p="http://schemas.openxmlformats.org/presentationml/2006/main" type="title" preserve="1">
   <p:cSld name="제목 슬라이드">
@@ -8000,7 +9079,7 @@
           <a:p>
             <a:fld id="{2F3E8B1C-86EF-43CF-8304-249481088644}" type="datetimeFigureOut">
               <a:rPr lang="en-US" smtClean="0"/>
-              <a:t>1/16/2023</a:t>
+              <a:t>1/18/2023</a:t>
             </a:fld>
             <a:endParaRPr lang="en-US"/>
           </a:p>
@@ -8200,7 +9279,7 @@
           <a:p>
             <a:fld id="{2F3E8B1C-86EF-43CF-8304-249481088644}" type="datetimeFigureOut">
               <a:rPr lang="en-US" smtClean="0"/>
-              <a:t>1/16/2023</a:t>
+              <a:t>1/18/2023</a:t>
             </a:fld>
             <a:endParaRPr lang="en-US"/>
           </a:p>
@@ -8410,7 +9489,7 @@
           <a:p>
             <a:fld id="{2F3E8B1C-86EF-43CF-8304-249481088644}" type="datetimeFigureOut">
               <a:rPr lang="en-US" smtClean="0"/>
-              <a:t>1/16/2023</a:t>
+              <a:t>1/18/2023</a:t>
             </a:fld>
             <a:endParaRPr lang="en-US"/>
           </a:p>
@@ -8610,7 +9689,7 @@
           <a:p>
             <a:fld id="{2F3E8B1C-86EF-43CF-8304-249481088644}" type="datetimeFigureOut">
               <a:rPr lang="en-US" smtClean="0"/>
-              <a:t>1/16/2023</a:t>
+              <a:t>1/18/2023</a:t>
             </a:fld>
             <a:endParaRPr lang="en-US"/>
           </a:p>
@@ -8886,7 +9965,7 @@
           <a:p>
             <a:fld id="{2F3E8B1C-86EF-43CF-8304-249481088644}" type="datetimeFigureOut">
               <a:rPr lang="en-US" smtClean="0"/>
-              <a:t>1/16/2023</a:t>
+              <a:t>1/18/2023</a:t>
             </a:fld>
             <a:endParaRPr lang="en-US"/>
           </a:p>
@@ -9159,7 +10238,7 @@
           <a:p>
             <a:fld id="{2F3E8B1C-86EF-43CF-8304-249481088644}" type="datetimeFigureOut">
               <a:rPr lang="en-US" smtClean="0"/>
-              <a:t>1/16/2023</a:t>
+              <a:t>1/18/2023</a:t>
             </a:fld>
             <a:endParaRPr lang="en-US"/>
           </a:p>
@@ -9582,7 +10661,7 @@
           <a:p>
             <a:fld id="{2F3E8B1C-86EF-43CF-8304-249481088644}" type="datetimeFigureOut">
               <a:rPr lang="en-US" smtClean="0"/>
-              <a:t>1/16/2023</a:t>
+              <a:t>1/18/2023</a:t>
             </a:fld>
             <a:endParaRPr lang="en-US"/>
           </a:p>
@@ -9724,7 +10803,7 @@
           <a:p>
             <a:fld id="{2F3E8B1C-86EF-43CF-8304-249481088644}" type="datetimeFigureOut">
               <a:rPr lang="en-US" smtClean="0"/>
-              <a:t>1/16/2023</a:t>
+              <a:t>1/18/2023</a:t>
             </a:fld>
             <a:endParaRPr lang="en-US"/>
           </a:p>
@@ -9837,7 +10916,7 @@
           <a:p>
             <a:fld id="{2F3E8B1C-86EF-43CF-8304-249481088644}" type="datetimeFigureOut">
               <a:rPr lang="en-US" smtClean="0"/>
-              <a:t>1/16/2023</a:t>
+              <a:t>1/18/2023</a:t>
             </a:fld>
             <a:endParaRPr lang="en-US"/>
           </a:p>
@@ -10150,7 +11229,7 @@
           <a:p>
             <a:fld id="{2F3E8B1C-86EF-43CF-8304-249481088644}" type="datetimeFigureOut">
               <a:rPr lang="en-US" smtClean="0"/>
-              <a:t>1/16/2023</a:t>
+              <a:t>1/18/2023</a:t>
             </a:fld>
             <a:endParaRPr lang="en-US"/>
           </a:p>
@@ -10443,7 +11522,7 @@
           <a:p>
             <a:fld id="{2F3E8B1C-86EF-43CF-8304-249481088644}" type="datetimeFigureOut">
               <a:rPr lang="en-US" smtClean="0"/>
-              <a:t>1/16/2023</a:t>
+              <a:t>1/18/2023</a:t>
             </a:fld>
             <a:endParaRPr lang="en-US"/>
           </a:p>
@@ -10686,7 +11765,7 @@
             <a:fld id="{2F3E8B1C-86EF-43CF-8304-249481088644}" type="datetimeFigureOut">
               <a:rPr lang="en-US" smtClean="0"/>
               <a:pPr/>
-              <a:t>1/16/2023</a:t>
+              <a:t>1/18/2023</a:t>
             </a:fld>
             <a:endParaRPr lang="en-US" dirty="0"/>
           </a:p>
@@ -11293,23 +12372,12 @@
           <a:p>
             <a:pPr algn="r"/>
             <a:r>
-              <a:rPr lang="en-US" altLang="ko-KR" dirty="0">
+              <a:rPr lang="ko-KR" altLang="en-US" dirty="0">
                 <a:latin typeface="Times New Roman" panose="02020603050405020304" pitchFamily="18" charset="0"/>
                 <a:cs typeface="Times New Roman" panose="02020603050405020304" pitchFamily="18" charset="0"/>
               </a:rPr>
-              <a:t>Kim </a:t>
-            </a:r>
-            <a:r>
-              <a:rPr lang="en-US" altLang="ko-KR" dirty="0" err="1">
-                <a:latin typeface="Times New Roman" panose="02020603050405020304" pitchFamily="18" charset="0"/>
-                <a:cs typeface="Times New Roman" panose="02020603050405020304" pitchFamily="18" charset="0"/>
-              </a:rPr>
-              <a:t>Dogyeom</a:t>
-            </a:r>
-            <a:endParaRPr lang="ko-KR" altLang="en-US" dirty="0">
-              <a:latin typeface="Times New Roman" panose="02020603050405020304" pitchFamily="18" charset="0"/>
-              <a:cs typeface="Times New Roman" panose="02020603050405020304" pitchFamily="18" charset="0"/>
-            </a:endParaRPr>
+              <a:t>김도겸</a:t>
+            </a:r>
           </a:p>
         </p:txBody>
       </p:sp>
@@ -12417,12 +13485,42 @@
           </a:graphicData>
         </a:graphic>
       </p:graphicFrame>
+    </p:spTree>
+    <p:extLst>
+      <p:ext uri="{BB962C8B-B14F-4D97-AF65-F5344CB8AC3E}">
+        <p14:creationId xmlns:p14="http://schemas.microsoft.com/office/powerpoint/2010/main" val="2819897306"/>
+      </p:ext>
+    </p:extLst>
+  </p:cSld>
+  <p:clrMapOvr>
+    <a:masterClrMapping/>
+  </p:clrMapOvr>
+</p:sld>
+</file>
+
+<file path=ppt/slides/slide16.xml><?xml version="1.0" encoding="utf-8"?>
+<p:sld xmlns:a="http://schemas.openxmlformats.org/drawingml/2006/main" xmlns:r="http://schemas.openxmlformats.org/officeDocument/2006/relationships" xmlns:p="http://schemas.openxmlformats.org/presentationml/2006/main">
+  <p:cSld>
+    <p:spTree>
+      <p:nvGrpSpPr>
+        <p:cNvPr id="1" name=""/>
+        <p:cNvGrpSpPr/>
+        <p:nvPr/>
+      </p:nvGrpSpPr>
+      <p:grpSpPr>
+        <a:xfrm>
+          <a:off x="0" y="0"/>
+          <a:ext cx="0" cy="0"/>
+          <a:chOff x="0" y="0"/>
+          <a:chExt cx="0" cy="0"/>
+        </a:xfrm>
+      </p:grpSpPr>
       <p:sp>
         <p:nvSpPr>
-          <p:cNvPr id="7" name="내용 개체 틀 2">
+          <p:cNvPr id="2" name="제목 1">
             <a:extLst>
               <a:ext uri="{FF2B5EF4-FFF2-40B4-BE49-F238E27FC236}">
-                <a16:creationId xmlns:a16="http://schemas.microsoft.com/office/drawing/2014/main" id="{2DD3C1F3-E452-CC10-3728-CEBC609513B7}"/>
+                <a16:creationId xmlns:a16="http://schemas.microsoft.com/office/drawing/2014/main" id="{69B94444-B23C-CDDA-CAFB-1F35CFFA9437}"/>
               </a:ext>
             </a:extLst>
           </p:cNvPr>
@@ -12430,68 +13528,235 @@
             <a:spLocks noGrp="1"/>
           </p:cNvSpPr>
           <p:nvPr>
-            <p:ph idx="1"/>
+            <p:ph type="title"/>
           </p:nvPr>
         </p:nvSpPr>
+        <p:spPr/>
+        <p:txBody>
+          <a:bodyPr/>
+          <a:lstStyle/>
+          <a:p>
+            <a:r>
+              <a:rPr lang="en-US" altLang="ko-KR" dirty="0"/>
+              <a:t>Objective function</a:t>
+            </a:r>
+            <a:endParaRPr lang="ko-KR" altLang="en-US" dirty="0"/>
+          </a:p>
+        </p:txBody>
+      </p:sp>
+      <p:pic>
+        <p:nvPicPr>
+          <p:cNvPr id="10" name="그림 9">
+            <a:extLst>
+              <a:ext uri="{FF2B5EF4-FFF2-40B4-BE49-F238E27FC236}">
+                <a16:creationId xmlns:a16="http://schemas.microsoft.com/office/drawing/2014/main" id="{7226C321-178C-A67C-9FB7-9E30B2143A26}"/>
+              </a:ext>
+            </a:extLst>
+          </p:cNvPr>
+          <p:cNvPicPr>
+            <a:picLocks noChangeAspect="1"/>
+          </p:cNvPicPr>
+          <p:nvPr/>
+        </p:nvPicPr>
+        <p:blipFill>
+          <a:blip r:embed="rId3"/>
+          <a:stretch>
+            <a:fillRect/>
+          </a:stretch>
+        </p:blipFill>
         <p:spPr>
           <a:xfrm>
-            <a:off x="6096000" y="2293125"/>
-            <a:ext cx="5295900" cy="3276401"/>
+            <a:off x="700635" y="1690261"/>
+            <a:ext cx="10092587" cy="3477477"/>
           </a:xfrm>
+          <a:prstGeom prst="rect">
+            <a:avLst/>
+          </a:prstGeom>
         </p:spPr>
-        <p:txBody>
-          <a:bodyPr>
-            <a:noAutofit/>
-          </a:bodyPr>
-          <a:lstStyle/>
-          <a:p>
-            <a:r>
-              <a:rPr lang="en-US" altLang="ko-KR" dirty="0"/>
-              <a:t>Use the most reliable Powell method first.</a:t>
-            </a:r>
-          </a:p>
-          <a:p>
-            <a:r>
-              <a:rPr lang="en-US" altLang="ko-KR" dirty="0"/>
-              <a:t>If the reference value is not exceeded, measure the optimization value using the </a:t>
-            </a:r>
-            <a:r>
-              <a:rPr lang="en-US" altLang="ko-KR" dirty="0" err="1"/>
-              <a:t>Nelder</a:t>
-            </a:r>
-            <a:r>
-              <a:rPr lang="en-US" altLang="ko-KR" dirty="0"/>
-              <a:t>-Mead method.</a:t>
-            </a:r>
-          </a:p>
-          <a:p>
-            <a:r>
-              <a:rPr lang="en-US" altLang="ko-KR" dirty="0"/>
-              <a:t>If </a:t>
-            </a:r>
-            <a:r>
-              <a:rPr lang="en-US" altLang="ko-KR" dirty="0" err="1"/>
-              <a:t>Nelder</a:t>
-            </a:r>
-            <a:r>
-              <a:rPr lang="en-US" altLang="ko-KR" dirty="0"/>
-              <a:t>-Mead method also not exceeded, uses </a:t>
-            </a:r>
-            <a:r>
-              <a:rPr lang="en-US" altLang="ko-KR" dirty="0" err="1"/>
-              <a:t>differential_evolution</a:t>
-            </a:r>
-            <a:r>
-              <a:rPr lang="en-US" altLang="ko-KR" dirty="0"/>
-              <a:t> and find minimum value among the tree optimized values.</a:t>
-            </a:r>
-          </a:p>
-        </p:txBody>
-      </p:sp>
+      </p:pic>
     </p:spTree>
     <p:extLst>
       <p:ext uri="{BB962C8B-B14F-4D97-AF65-F5344CB8AC3E}">
-        <p14:creationId xmlns:p14="http://schemas.microsoft.com/office/powerpoint/2010/main" val="2819897306"/>
+        <p14:creationId xmlns:p14="http://schemas.microsoft.com/office/powerpoint/2010/main" val="2989848951"/>
+      </p:ext>
+    </p:extLst>
+  </p:cSld>
+  <p:clrMapOvr>
+    <a:masterClrMapping/>
+  </p:clrMapOvr>
+</p:sld>
+</file>
+
+<file path=ppt/slides/slide17.xml><?xml version="1.0" encoding="utf-8"?>
+<p:sld xmlns:a="http://schemas.openxmlformats.org/drawingml/2006/main" xmlns:r="http://schemas.openxmlformats.org/officeDocument/2006/relationships" xmlns:p="http://schemas.openxmlformats.org/presentationml/2006/main">
+  <p:cSld>
+    <p:spTree>
+      <p:nvGrpSpPr>
+        <p:cNvPr id="1" name=""/>
+        <p:cNvGrpSpPr/>
+        <p:nvPr/>
+      </p:nvGrpSpPr>
+      <p:grpSpPr>
+        <a:xfrm>
+          <a:off x="0" y="0"/>
+          <a:ext cx="0" cy="0"/>
+          <a:chOff x="0" y="0"/>
+          <a:chExt cx="0" cy="0"/>
+        </a:xfrm>
+      </p:grpSpPr>
+      <p:sp>
+        <p:nvSpPr>
+          <p:cNvPr id="2" name="제목 1">
+            <a:extLst>
+              <a:ext uri="{FF2B5EF4-FFF2-40B4-BE49-F238E27FC236}">
+                <a16:creationId xmlns:a16="http://schemas.microsoft.com/office/drawing/2014/main" id="{69B94444-B23C-CDDA-CAFB-1F35CFFA9437}"/>
+              </a:ext>
+            </a:extLst>
+          </p:cNvPr>
+          <p:cNvSpPr>
+            <a:spLocks noGrp="1"/>
+          </p:cNvSpPr>
+          <p:nvPr>
+            <p:ph type="title"/>
+          </p:nvPr>
+        </p:nvSpPr>
+        <p:spPr/>
+        <p:txBody>
+          <a:bodyPr/>
+          <a:lstStyle/>
+          <a:p>
+            <a:r>
+              <a:rPr lang="en-US" altLang="ko-KR" dirty="0"/>
+              <a:t>Objective function</a:t>
+            </a:r>
+            <a:endParaRPr lang="ko-KR" altLang="en-US" dirty="0"/>
+          </a:p>
+        </p:txBody>
+      </p:sp>
+      <p:pic>
+        <p:nvPicPr>
+          <p:cNvPr id="4" name="그림 3">
+            <a:extLst>
+              <a:ext uri="{FF2B5EF4-FFF2-40B4-BE49-F238E27FC236}">
+                <a16:creationId xmlns:a16="http://schemas.microsoft.com/office/drawing/2014/main" id="{6898974A-442E-7139-D533-D6AC7EA84EA4}"/>
+              </a:ext>
+            </a:extLst>
+          </p:cNvPr>
+          <p:cNvPicPr>
+            <a:picLocks noChangeAspect="1"/>
+          </p:cNvPicPr>
+          <p:nvPr/>
+        </p:nvPicPr>
+        <p:blipFill>
+          <a:blip r:embed="rId3"/>
+          <a:stretch>
+            <a:fillRect/>
+          </a:stretch>
+        </p:blipFill>
+        <p:spPr>
+          <a:xfrm>
+            <a:off x="700635" y="1651563"/>
+            <a:ext cx="9296400" cy="3554873"/>
+          </a:xfrm>
+          <a:prstGeom prst="rect">
+            <a:avLst/>
+          </a:prstGeom>
+        </p:spPr>
+      </p:pic>
+    </p:spTree>
+    <p:extLst>
+      <p:ext uri="{BB962C8B-B14F-4D97-AF65-F5344CB8AC3E}">
+        <p14:creationId xmlns:p14="http://schemas.microsoft.com/office/powerpoint/2010/main" val="2319124114"/>
+      </p:ext>
+    </p:extLst>
+  </p:cSld>
+  <p:clrMapOvr>
+    <a:masterClrMapping/>
+  </p:clrMapOvr>
+</p:sld>
+</file>
+
+<file path=ppt/slides/slide18.xml><?xml version="1.0" encoding="utf-8"?>
+<p:sld xmlns:a="http://schemas.openxmlformats.org/drawingml/2006/main" xmlns:r="http://schemas.openxmlformats.org/officeDocument/2006/relationships" xmlns:p="http://schemas.openxmlformats.org/presentationml/2006/main">
+  <p:cSld>
+    <p:spTree>
+      <p:nvGrpSpPr>
+        <p:cNvPr id="1" name=""/>
+        <p:cNvGrpSpPr/>
+        <p:nvPr/>
+      </p:nvGrpSpPr>
+      <p:grpSpPr>
+        <a:xfrm>
+          <a:off x="0" y="0"/>
+          <a:ext cx="0" cy="0"/>
+          <a:chOff x="0" y="0"/>
+          <a:chExt cx="0" cy="0"/>
+        </a:xfrm>
+      </p:grpSpPr>
+      <p:sp>
+        <p:nvSpPr>
+          <p:cNvPr id="2" name="제목 1">
+            <a:extLst>
+              <a:ext uri="{FF2B5EF4-FFF2-40B4-BE49-F238E27FC236}">
+                <a16:creationId xmlns:a16="http://schemas.microsoft.com/office/drawing/2014/main" id="{76D354C6-BA7E-F549-B5A5-A7DDE143BE65}"/>
+              </a:ext>
+            </a:extLst>
+          </p:cNvPr>
+          <p:cNvSpPr>
+            <a:spLocks noGrp="1"/>
+          </p:cNvSpPr>
+          <p:nvPr>
+            <p:ph type="title"/>
+          </p:nvPr>
+        </p:nvSpPr>
+        <p:spPr/>
+        <p:txBody>
+          <a:bodyPr/>
+          <a:lstStyle/>
+          <a:p>
+            <a:r>
+              <a:rPr lang="en-US" altLang="ko-KR" dirty="0"/>
+              <a:t>Result</a:t>
+            </a:r>
+            <a:endParaRPr lang="ko-KR" altLang="en-US" dirty="0"/>
+          </a:p>
+        </p:txBody>
+      </p:sp>
+      <p:graphicFrame>
+        <p:nvGraphicFramePr>
+          <p:cNvPr id="6" name="내용 개체 틀 5">
+            <a:extLst>
+              <a:ext uri="{FF2B5EF4-FFF2-40B4-BE49-F238E27FC236}">
+                <a16:creationId xmlns:a16="http://schemas.microsoft.com/office/drawing/2014/main" id="{8CB1B57B-2344-4E48-1B92-4673E49F1AE2}"/>
+              </a:ext>
+            </a:extLst>
+          </p:cNvPr>
+          <p:cNvGraphicFramePr>
+            <a:graphicFrameLocks noGrp="1"/>
+          </p:cNvGraphicFramePr>
+          <p:nvPr>
+            <p:ph idx="1"/>
+            <p:extLst>
+              <p:ext uri="{D42A27DB-BD31-4B8C-83A1-F6EECF244321}">
+                <p14:modId xmlns:p14="http://schemas.microsoft.com/office/powerpoint/2010/main" val="307617834"/>
+              </p:ext>
+            </p:extLst>
+          </p:nvPr>
+        </p:nvGraphicFramePr>
+        <p:xfrm>
+          <a:off x="700088" y="2292350"/>
+          <a:ext cx="10691812" cy="3636963"/>
+        </p:xfrm>
+        <a:graphic>
+          <a:graphicData uri="http://schemas.openxmlformats.org/drawingml/2006/chart">
+            <c:chart xmlns:c="http://schemas.openxmlformats.org/drawingml/2006/chart" xmlns:r="http://schemas.openxmlformats.org/officeDocument/2006/relationships" r:id="rId2"/>
+          </a:graphicData>
+        </a:graphic>
+      </p:graphicFrame>
+    </p:spTree>
+    <p:extLst>
+      <p:ext uri="{BB962C8B-B14F-4D97-AF65-F5344CB8AC3E}">
+        <p14:creationId xmlns:p14="http://schemas.microsoft.com/office/powerpoint/2010/main" val="2099416088"/>
       </p:ext>
     </p:extLst>
   </p:cSld>
@@ -12582,7 +13847,39 @@
           <a:p>
             <a:r>
               <a:rPr lang="en-US" altLang="ko-KR" dirty="0"/>
-              <a:t>Find the difference between the predicted value and the actual value.</a:t>
+              <a:t>Find the difference between the initial</a:t>
+            </a:r>
+            <a:r>
+              <a:rPr lang="ko-KR" altLang="en-US" dirty="0"/>
+              <a:t> </a:t>
+            </a:r>
+            <a:r>
+              <a:rPr lang="en-US" altLang="ko-KR" dirty="0"/>
+              <a:t>state</a:t>
+            </a:r>
+            <a:r>
+              <a:rPr lang="ko-KR" altLang="en-US" dirty="0"/>
+              <a:t> </a:t>
+            </a:r>
+            <a:r>
+              <a:rPr lang="en-US" altLang="ko-KR" dirty="0"/>
+              <a:t>and</a:t>
+            </a:r>
+            <a:r>
+              <a:rPr lang="ko-KR" altLang="en-US" dirty="0"/>
+              <a:t> </a:t>
+            </a:r>
+            <a:r>
+              <a:rPr lang="en-US" altLang="ko-KR" dirty="0"/>
+              <a:t>target</a:t>
+            </a:r>
+            <a:r>
+              <a:rPr lang="ko-KR" altLang="en-US" dirty="0"/>
+              <a:t> </a:t>
+            </a:r>
+            <a:r>
+              <a:rPr lang="en-US" altLang="ko-KR" dirty="0"/>
+              <a:t>state.</a:t>
             </a:r>
           </a:p>
           <a:p>
@@ -12604,7 +13901,7 @@
 </file>
 
 <file path=ppt/slides/slide3.xml><?xml version="1.0" encoding="utf-8"?>
-<p:sld xmlns:a="http://schemas.openxmlformats.org/drawingml/2006/main" xmlns:r="http://schemas.openxmlformats.org/officeDocument/2006/relationships" xmlns:p="http://schemas.openxmlformats.org/presentationml/2006/main">
+<p:sld xmlns:a="http://schemas.openxmlformats.org/drawingml/2006/main" xmlns:r="http://schemas.openxmlformats.org/officeDocument/2006/relationships" xmlns:p="http://schemas.openxmlformats.org/presentationml/2006/main" show="0">
   <p:cSld>
     <p:spTree>
       <p:nvGrpSpPr>
@@ -12704,7 +14001,7 @@
 </file>
 
 <file path=ppt/slides/slide4.xml><?xml version="1.0" encoding="utf-8"?>
-<p:sld xmlns:a="http://schemas.openxmlformats.org/drawingml/2006/main" xmlns:r="http://schemas.openxmlformats.org/officeDocument/2006/relationships" xmlns:p="http://schemas.openxmlformats.org/presentationml/2006/main">
+<p:sld xmlns:a="http://schemas.openxmlformats.org/drawingml/2006/main" xmlns:r="http://schemas.openxmlformats.org/officeDocument/2006/relationships" xmlns:p="http://schemas.openxmlformats.org/presentationml/2006/main" show="0">
   <p:cSld>
     <p:spTree>
       <p:nvGrpSpPr>
@@ -13175,7 +14472,7 @@
 </file>
 
 <file path=ppt/slides/slide6.xml><?xml version="1.0" encoding="utf-8"?>
-<p:sld xmlns:a="http://schemas.openxmlformats.org/drawingml/2006/main" xmlns:r="http://schemas.openxmlformats.org/officeDocument/2006/relationships" xmlns:p="http://schemas.openxmlformats.org/presentationml/2006/main">
+<p:sld xmlns:a="http://schemas.openxmlformats.org/drawingml/2006/main" xmlns:r="http://schemas.openxmlformats.org/officeDocument/2006/relationships" xmlns:p="http://schemas.openxmlformats.org/presentationml/2006/main" show="0">
   <p:cSld>
     <p:spTree>
       <p:nvGrpSpPr>
@@ -13317,7 +14614,7 @@
 </file>
 
 <file path=ppt/slides/slide7.xml><?xml version="1.0" encoding="utf-8"?>
-<p:sld xmlns:a="http://schemas.openxmlformats.org/drawingml/2006/main" xmlns:r="http://schemas.openxmlformats.org/officeDocument/2006/relationships" xmlns:p="http://schemas.openxmlformats.org/presentationml/2006/main">
+<p:sld xmlns:a="http://schemas.openxmlformats.org/drawingml/2006/main" xmlns:r="http://schemas.openxmlformats.org/officeDocument/2006/relationships" xmlns:p="http://schemas.openxmlformats.org/presentationml/2006/main" show="0">
   <p:cSld>
     <p:spTree>
       <p:nvGrpSpPr>
